--- a/fleetana-launch/brand/templates/powerpoint/Fleetana-Template-EN.pptx
+++ b/fleetana-launch/brand/templates/powerpoint/Fleetana-Template-EN.pptx
@@ -122,19 +122,19 @@
   <p:extLst>
     <p:ext uri="{521415D9-36F7-43E2-AB2F-B90AF26B5E84}">
       <p14:sectionLst xmlns:p14="http://schemas.microsoft.com/office/powerpoint/2010/main">
-        <p14:section name="Introduction" id="{20c990a4-bfab-8ac2-a9b4-dbcdc8b0c77e}">
+        <p14:section name="Introduction" id="{67c993b5-f2e7-a73d-c38d-ae7840cc65e0}">
           <p14:sldIdLst>
             <p14:sldId id="256"/>
             <p14:sldId id="257"/>
           </p14:sldIdLst>
         </p14:section>
-        <p14:section name="The problem" id="{4005ff1c-deb3-7a97-5e2d-7dcbb47a5902}">
+        <p14:section name="The problem" id="{2f07044c-8253-9bf5-1727-51e15b03438c}">
           <p14:sldIdLst>
             <p14:sldId id="258"/>
             <p14:sldId id="259"/>
           </p14:sldIdLst>
         </p14:section>
-        <p14:section name="What Fleetana does" id="{8992dc78-2ee2-e620-e012-dcdbb46e2957}">
+        <p14:section name="What Fleetana does" id="{0f1889f8-d4e8-a317-ef05-be04ccda4c8c}">
           <p14:sldIdLst>
             <p14:sldId id="260"/>
             <p14:sldId id="261"/>
@@ -145,7 +145,7 @@
             <p14:sldId id="266"/>
           </p14:sldIdLst>
         </p14:section>
-        <p14:section name="Proposal" id="{2c07da57-3205-f5cf-029b-80a87f4378af}">
+        <p14:section name="Proposal" id="{bb85733c-825b-4472-1c7d-4e336aeeb7b8}">
           <p14:sldIdLst>
             <p14:sldId id="267"/>
             <p14:sldId id="268"/>

--- a/fleetana-launch/brand/templates/powerpoint/Fleetana-Template-EN.pptx
+++ b/fleetana-launch/brand/templates/powerpoint/Fleetana-Template-EN.pptx
@@ -122,19 +122,19 @@
   <p:extLst>
     <p:ext uri="{521415D9-36F7-43E2-AB2F-B90AF26B5E84}">
       <p14:sectionLst xmlns:p14="http://schemas.microsoft.com/office/powerpoint/2010/main">
-        <p14:section name="Introduction" id="{67c993b5-f2e7-a73d-c38d-ae7840cc65e0}">
+        <p14:section name="Introduction" id="{9174f794-3273-1023-e488-2ca460864794}">
           <p14:sldIdLst>
             <p14:sldId id="256"/>
             <p14:sldId id="257"/>
           </p14:sldIdLst>
         </p14:section>
-        <p14:section name="The problem" id="{2f07044c-8253-9bf5-1727-51e15b03438c}">
+        <p14:section name="The problem" id="{4927610a-4524-0204-a98d-f5d85663f60f}">
           <p14:sldIdLst>
             <p14:sldId id="258"/>
             <p14:sldId id="259"/>
           </p14:sldIdLst>
         </p14:section>
-        <p14:section name="What Fleetana does" id="{0f1889f8-d4e8-a317-ef05-be04ccda4c8c}">
+        <p14:section name="What Fleetana does" id="{afd8e116-d24a-677a-ea06-2b9406c1d8fd}">
           <p14:sldIdLst>
             <p14:sldId id="260"/>
             <p14:sldId id="261"/>
@@ -145,7 +145,7 @@
             <p14:sldId id="266"/>
           </p14:sldIdLst>
         </p14:section>
-        <p14:section name="Proposal" id="{bb85733c-825b-4472-1c7d-4e336aeeb7b8}">
+        <p14:section name="Proposal" id="{3177785d-ca0a-8671-1bac-550dfa835456}">
           <p14:sldIdLst>
             <p14:sldId id="267"/>
             <p14:sldId id="268"/>

--- a/fleetana-launch/brand/templates/powerpoint/Fleetana-Template-EN.pptx
+++ b/fleetana-launch/brand/templates/powerpoint/Fleetana-Template-EN.pptx
@@ -122,19 +122,19 @@
   <p:extLst>
     <p:ext uri="{521415D9-36F7-43E2-AB2F-B90AF26B5E84}">
       <p14:sectionLst xmlns:p14="http://schemas.microsoft.com/office/powerpoint/2010/main">
-        <p14:section name="Introduction" id="{9174f794-3273-1023-e488-2ca460864794}">
+        <p14:section name="Introduction" id="{2859ad25-3a23-ae3d-bc82-3cf72e8bed65}">
           <p14:sldIdLst>
             <p14:sldId id="256"/>
             <p14:sldId id="257"/>
           </p14:sldIdLst>
         </p14:section>
-        <p14:section name="The problem" id="{4927610a-4524-0204-a98d-f5d85663f60f}">
+        <p14:section name="The problem" id="{2f65c248-eb1c-cb25-76fe-af297e6a055a}">
           <p14:sldIdLst>
             <p14:sldId id="258"/>
             <p14:sldId id="259"/>
           </p14:sldIdLst>
         </p14:section>
-        <p14:section name="What Fleetana does" id="{afd8e116-d24a-677a-ea06-2b9406c1d8fd}">
+        <p14:section name="What Fleetana does" id="{0df6c4de-0378-ac19-d26f-1371572f1640}">
           <p14:sldIdLst>
             <p14:sldId id="260"/>
             <p14:sldId id="261"/>
@@ -145,7 +145,7 @@
             <p14:sldId id="266"/>
           </p14:sldIdLst>
         </p14:section>
-        <p14:section name="Proposal" id="{3177785d-ca0a-8671-1bac-550dfa835456}">
+        <p14:section name="Proposal" id="{2cfb5d81-cbe3-4b38-adbe-b3631cf168c0}">
           <p14:sldIdLst>
             <p14:sldId id="267"/>
             <p14:sldId id="268"/>
@@ -1997,7 +1997,7 @@
         </p:blipFill>
         <p:spPr>
           <a:xfrm>
-            <a:off x="548640" y="548640"/>
+            <a:off x="8851026" y="548640"/>
             <a:ext cx="2792029" cy="384048"/>
           </a:xfrm>
           <a:prstGeom prst="rect">
@@ -2222,7 +2222,7 @@
         </p:blipFill>
         <p:spPr>
           <a:xfrm>
-            <a:off x="548640" y="384048"/>
+            <a:off x="9914656" y="384048"/>
             <a:ext cx="1728399" cy="237744"/>
           </a:xfrm>
           <a:prstGeom prst="rect">
@@ -2479,7 +2479,7 @@
         </p:blipFill>
         <p:spPr>
           <a:xfrm>
-            <a:off x="548640" y="384048"/>
+            <a:off x="9914656" y="384048"/>
             <a:ext cx="1728399" cy="237744"/>
           </a:xfrm>
           <a:prstGeom prst="rect">
@@ -2655,7 +2655,7 @@
         </p:blipFill>
         <p:spPr>
           <a:xfrm>
-            <a:off x="548640" y="384048"/>
+            <a:off x="9914656" y="384048"/>
             <a:ext cx="1728399" cy="237744"/>
           </a:xfrm>
           <a:prstGeom prst="rect">
